--- a/Project Report CSE1021.pptx
+++ b/Project Report CSE1021.pptx
@@ -4855,7 +4855,7 @@
               </a:defRPr>
             </a:pPr>
             <a:r>
-              <a:rPr sz="2850" b="1">
+              <a:rPr lang="en-IN" sz="2850" b="1" dirty="0">
                 <a:solidFill>
                   <a:srgbClr val="16324F"/>
                 </a:solidFill>
@@ -4863,7 +4863,18 @@
                 <a:ea typeface="Arial"/>
                 <a:cs typeface="Arial"/>
               </a:rPr>
-              <a:t>Screenshots and Sample Results</a:t>
+              <a:t>Screenshots and </a:t>
+            </a:r>
+            <a:r>
+              <a:rPr sz="2850" b="1" dirty="0">
+                <a:solidFill>
+                  <a:srgbClr val="16324F"/>
+                </a:solidFill>
+                <a:latin typeface="Arial"/>
+                <a:ea typeface="Arial"/>
+                <a:cs typeface="Arial"/>
+              </a:rPr>
+              <a:t>Sample Results</a:t>
             </a:r>
           </a:p>
         </p:txBody>
@@ -5030,8 +5041,8 @@
         </p:nvSpPr>
         <p:spPr>
           <a:xfrm>
-            <a:off x="1285875" y="2095500"/>
-            <a:ext cx="9525000" cy="2857500"/>
+            <a:off x="1095375" y="1792390"/>
+            <a:ext cx="9525000" cy="1758745"/>
           </a:xfrm>
           <a:prstGeom prst="roundRect">
             <a:avLst>
@@ -5237,7 +5248,7 @@
               </a:defRPr>
             </a:pPr>
             <a:r>
-              <a:rPr sz="1350" b="0">
+              <a:rPr sz="1350" b="0" dirty="0">
                 <a:solidFill>
                   <a:srgbClr val="596B7A"/>
                 </a:solidFill>
@@ -5245,11 +5256,47 @@
                 <a:ea typeface="Arial"/>
                 <a:cs typeface="Arial"/>
               </a:rPr>
-              <a:t>This is a sample calculation. Add a real screenshot from your own VS Code run if your instructor asks for one.</a:t>
-            </a:r>
-          </a:p>
-        </p:txBody>
-      </p:sp>
+              <a:t>.</a:t>
+            </a:r>
+          </a:p>
+        </p:txBody>
+      </p:sp>
+      <p:pic>
+        <p:nvPicPr>
+          <p:cNvPr id="12" name="Picture 11">
+            <a:extLst>
+              <a:ext uri="{FF2B5EF4-FFF2-40B4-BE49-F238E27FC236}">
+                <a16:creationId xmlns:a16="http://schemas.microsoft.com/office/drawing/2014/main" id="{637DFEF5-4568-12E1-2575-1CB1970E16BD}"/>
+              </a:ext>
+            </a:extLst>
+          </p:cNvPr>
+          <p:cNvPicPr>
+            <a:picLocks noChangeAspect="1"/>
+          </p:cNvPicPr>
+          <p:nvPr/>
+        </p:nvPicPr>
+        <p:blipFill>
+          <a:blip r:embed="rId3">
+            <a:extLst>
+              <a:ext uri="{28A0092B-C50C-407E-A947-70E740481C1C}">
+                <a14:useLocalDpi xmlns:a14="http://schemas.microsoft.com/office/drawing/2010/main" val="0"/>
+              </a:ext>
+            </a:extLst>
+          </a:blip>
+          <a:stretch>
+            <a:fillRect/>
+          </a:stretch>
+        </p:blipFill>
+        <p:spPr>
+          <a:xfrm>
+            <a:off x="1095375" y="3562350"/>
+            <a:ext cx="6492803" cy="3126658"/>
+          </a:xfrm>
+          <a:prstGeom prst="rect">
+            <a:avLst/>
+          </a:prstGeom>
+        </p:spPr>
+      </p:pic>
     </p:spTree>
     <p:extLst>
       <p:ext uri="{BB962C8B-B14F-4D97-AF65-F5344CB8AC3E}">
@@ -5796,17 +5843,14 @@
                 <a:cs typeface="Arial"/>
               </a:defRPr>
             </a:pPr>
-            <a:r>
-              <a:rPr sz="1275" b="0">
-                <a:solidFill>
-                  <a:srgbClr val="596B7A"/>
-                </a:solidFill>
-                <a:latin typeface="Arial"/>
-                <a:ea typeface="Arial"/>
-                <a:cs typeface="Arial"/>
-              </a:rPr>
-              <a:t>These are expected examples. Confirm the output by running the program before submission.</a:t>
-            </a:r>
+            <a:endParaRPr sz="1275" b="0" dirty="0">
+              <a:solidFill>
+                <a:srgbClr val="596B7A"/>
+              </a:solidFill>
+              <a:latin typeface="Arial"/>
+              <a:ea typeface="Arial"/>
+              <a:cs typeface="Arial"/>
+            </a:endParaRPr>
           </a:p>
         </p:txBody>
       </p:sp>
@@ -6095,7 +6139,7 @@
               </a:defRPr>
             </a:pPr>
             <a:r>
-              <a:rPr sz="1650" b="0">
+              <a:rPr sz="1650" b="0" dirty="0">
                 <a:solidFill>
                   <a:srgbClr val="243444"/>
                 </a:solidFill>
@@ -6107,7 +6151,7 @@
             </a:r>
           </a:p>
           <a:p>
-            <a:endParaRPr sz="1650" b="0">
+            <a:endParaRPr sz="1650" b="0" dirty="0">
               <a:solidFill>
                 <a:srgbClr val="243444"/>
               </a:solidFill>
@@ -6128,7 +6172,7 @@
               </a:defRPr>
             </a:pPr>
             <a:r>
-              <a:rPr sz="1650" b="0">
+              <a:rPr sz="1650" b="0" dirty="0">
                 <a:solidFill>
                   <a:srgbClr val="243444"/>
                 </a:solidFill>
@@ -6140,7 +6184,7 @@
             </a:r>
           </a:p>
           <a:p>
-            <a:endParaRPr sz="1650" b="0">
+            <a:endParaRPr sz="1650" b="0" dirty="0">
               <a:solidFill>
                 <a:srgbClr val="243444"/>
               </a:solidFill>
@@ -6161,7 +6205,7 @@
               </a:defRPr>
             </a:pPr>
             <a:r>
-              <a:rPr sz="1650" b="0">
+              <a:rPr sz="1650" b="0" dirty="0">
                 <a:solidFill>
                   <a:srgbClr val="243444"/>
                 </a:solidFill>
@@ -6173,7 +6217,7 @@
             </a:r>
           </a:p>
           <a:p>
-            <a:endParaRPr sz="1650" b="0">
+            <a:endParaRPr sz="1650" b="0" dirty="0">
               <a:solidFill>
                 <a:srgbClr val="243444"/>
               </a:solidFill>
@@ -6194,7 +6238,7 @@
               </a:defRPr>
             </a:pPr>
             <a:r>
-              <a:rPr sz="1650" b="0">
+              <a:rPr sz="1650" b="0" dirty="0">
                 <a:solidFill>
                   <a:srgbClr val="243444"/>
                 </a:solidFill>
@@ -6204,6 +6248,34 @@
               </a:rPr>
               <a:t>• Print clear results</a:t>
             </a:r>
+            <a:endParaRPr lang="en-US" sz="1650" b="0" dirty="0">
+              <a:solidFill>
+                <a:srgbClr val="243444"/>
+              </a:solidFill>
+              <a:latin typeface="Arial"/>
+              <a:ea typeface="Arial"/>
+              <a:cs typeface="Arial"/>
+            </a:endParaRPr>
+          </a:p>
+          <a:p>
+            <a:pPr algn="l">
+              <a:defRPr sz="1650" b="0">
+                <a:solidFill>
+                  <a:srgbClr val="243444"/>
+                </a:solidFill>
+                <a:latin typeface="Arial"/>
+                <a:ea typeface="Arial"/>
+                <a:cs typeface="Arial"/>
+              </a:defRPr>
+            </a:pPr>
+            <a:endParaRPr sz="1650" b="0" dirty="0">
+              <a:solidFill>
+                <a:srgbClr val="243444"/>
+              </a:solidFill>
+              <a:latin typeface="Arial"/>
+              <a:ea typeface="Arial"/>
+              <a:cs typeface="Arial"/>
+            </a:endParaRPr>
           </a:p>
         </p:txBody>
       </p:sp>
